--- a/Topic_C/Exam_Practice/TC-L11_Writing_Workshop_Integrated_Communication_Workshop.pptx
+++ b/Topic_C/Exam_Practice/TC-L11_Writing_Workshop_Integrated_Communication_Workshop.pptx
@@ -784,7 +784,11 @@
           <a:lstStyle/>
           <a:p>
             <a:r>
-              <a:rPr lang="en-US" dirty="0"/>
+              <a:rPr lang="ar-SA" dirty="0">
+                <a:latin typeface="Amiri" pitchFamily="2" charset="-78"/>
+                <a:ea typeface="Amiri" pitchFamily="2" charset="-78"/>
+                <a:cs typeface="Amiri" pitchFamily="2" charset="-78"/>
+              </a:rPr>
               <a:t>Q3 (3 min to choose and read). Title (أ) suits Core and Develop; title (ب) suits Stretch.</a:t>
             </a:r>
             <a:endParaRPr lang="en-US" dirty="0"/>
@@ -1403,7 +1407,11 @@
           <a:lstStyle/>
           <a:p>
             <a:r>
-              <a:rPr lang="en-US" dirty="0"/>
+              <a:rPr lang="ar-SA" dirty="0">
+                <a:latin typeface="Amiri" pitchFamily="2" charset="-78"/>
+                <a:ea typeface="Amiri" pitchFamily="2" charset="-78"/>
+                <a:cs typeface="Amiri" pitchFamily="2" charset="-78"/>
+              </a:rPr>
               <a:t>WELCOME (1 min) — while students join.
 • Greet each student by name as they arrive: السَّلَامُ عَلَيْكُمْ. Take the register (Pastoral Tracker: attendance 0/1).
 • 2-MINUTE CHECK-IN (SEND training): a private chat to any student who seemed unsettled last lesson — “Are you okay today? 👍 / 👎”.
@@ -1936,7 +1944,11 @@
           <a:lstStyle/>
           <a:p>
             <a:r>
-              <a:rPr lang="en-US" dirty="0"/>
+              <a:rPr lang="ar-SA" dirty="0">
+                <a:latin typeface="Amiri" pitchFamily="2" charset="-78"/>
+                <a:ea typeface="Amiri" pitchFamily="2" charset="-78"/>
+                <a:cs typeface="Amiri" pitchFamily="2" charset="-78"/>
+              </a:rPr>
               <a:t>Question words: صِفْ (describe!) · كَيْفَ (how) · أَثَّرَ (affected — PAST) · مَاذَا فَعَلْتَ (what did you do — PAST) · سَتَفْعَلُ (will do — FUTURE).</a:t>
             </a:r>
             <a:endParaRPr lang="en-US" dirty="0"/>
@@ -2508,6 +2520,7 @@
                   <a:srgbClr val="D4AF37"/>
                 </a:solidFill>
                 <a:latin typeface="Amiri" pitchFamily="2" charset="-78"/>
+                <a:ea typeface="Amiri" pitchFamily="2" charset="-78"/>
                 <a:cs typeface="Amiri" pitchFamily="2" charset="-78"/>
               </a:rPr>
               <a:t>م</a:t>
@@ -2714,6 +2727,7 @@
                   <a:srgbClr val="D4AF37"/>
                 </a:solidFill>
                 <a:latin typeface="Amiri" pitchFamily="2" charset="-78"/>
+                <a:ea typeface="Amiri" pitchFamily="2" charset="-78"/>
                 <a:cs typeface="Amiri" pitchFamily="2" charset="-78"/>
               </a:rPr>
               <a:t>وَرْشَةُ الكِتَابَةِ — وَرْشَةُ التَّوَاصُلِ المُتَكَامِلِ</a:t>
@@ -3171,6 +3185,7 @@
                   <a:srgbClr val="D4AF37"/>
                 </a:solidFill>
                 <a:latin typeface="Amiri" pitchFamily="2" charset="-78"/>
+                <a:ea typeface="Amiri" pitchFamily="2" charset="-78"/>
                 <a:cs typeface="Amiri" pitchFamily="2" charset="-78"/>
               </a:rPr>
               <a:t>م</a:t>
@@ -3491,6 +3506,7 @@
                   <a:srgbClr val="8A6D1E"/>
                 </a:solidFill>
                 <a:latin typeface="Amiri" pitchFamily="2" charset="-78"/>
+                <a:ea typeface="Amiri" pitchFamily="2" charset="-78"/>
                 <a:cs typeface="Amiri" pitchFamily="2" charset="-78"/>
               </a:rPr>
               <a:t>نَمُوذَجُ الإِجَابَةِ</a:t>
@@ -3604,6 +3620,7 @@
                   <a:srgbClr val="1F2A37"/>
                 </a:solidFill>
                 <a:latin typeface="Amiri" pitchFamily="2" charset="-78"/>
+                <a:ea typeface="Amiri" pitchFamily="2" charset="-78"/>
                 <a:cs typeface="Amiri" pitchFamily="2" charset="-78"/>
               </a:rPr>
               <a:t>مَرْحَبًا يَا يُوسُفُ،</a:t>
@@ -3623,6 +3640,7 @@
                   <a:srgbClr val="1F2A37"/>
                 </a:solidFill>
                 <a:latin typeface="Amiri" pitchFamily="2" charset="-78"/>
+                <a:ea typeface="Amiri" pitchFamily="2" charset="-78"/>
                 <a:cs typeface="Amiri" pitchFamily="2" charset="-78"/>
               </a:rPr>
               <a:t>كَيْفَ حَالُكَ؟ وَصَلْتُ أَمْسِ إِلَى إِدِنْبَرَةَ مَعَ صَفِّي. أَوَّلًا، المَدِينَةُ جَمِيلَةٌ جِدًّا؛ فِيهَا قَلْعَةٌ قَدِيمَةٌ عَلَى جَبَلٍ، وَتُوجَدُ مَتَاحِفُ كَثِيرَةٌ. لٰكِنَّ الجَوَّ بَارِدٌ وَمُمْطِرٌ، وَهُوَ أَبْرَدُ مِنْ جَوِّ لَنْدَنَ. أَمْسِ زُرْنَا المَتْحَفَ الوَطَنِيَّ، وَأَخَذْتُ صُوَرًا كَثِيرَةً بِهَاتِفِي. بِالإِضَافَةِ إِلَى ذٰلِكَ، المَدِينَةُ نَظِيفَةٌ، وَفِيهَا سَلَّاتٌ لِإِعَادَةِ التَّدْوِيرِ فِي كُلِّ شَارِعٍ. فِي رَأْيِي، هِيَ مَدِينَةٌ رَائِعَةٌ. غَدًا سَنَصْعَدُ إِلَى القَلْعَةِ إِذَا تَوَقَّفَ المَطَرُ.</a:t>
@@ -3642,6 +3660,7 @@
                   <a:srgbClr val="1F2A37"/>
                 </a:solidFill>
                 <a:latin typeface="Amiri" pitchFamily="2" charset="-78"/>
+                <a:ea typeface="Amiri" pitchFamily="2" charset="-78"/>
                 <a:cs typeface="Amiri" pitchFamily="2" charset="-78"/>
               </a:rPr>
               <a:t>إِلَى اللِّقَاءِ،</a:t>
@@ -3661,6 +3680,7 @@
                   <a:srgbClr val="1F2A37"/>
                 </a:solidFill>
                 <a:latin typeface="Amiri" pitchFamily="2" charset="-78"/>
+                <a:ea typeface="Amiri" pitchFamily="2" charset="-78"/>
                 <a:cs typeface="Amiri" pitchFamily="2" charset="-78"/>
               </a:rPr>
               <a:t>عَلِيٌّ</a:t>
@@ -3824,11 +3844,12 @@
               <a:buNone/>
             </a:pPr>
             <a:r>
-              <a:rPr lang="en-US" sz="950" b="1" dirty="0">
+              <a:rPr lang="ar-SA" sz="950" b="1" dirty="0">
                 <a:solidFill>
                   <a:srgbClr val="FFFFFF"/>
                 </a:solidFill>
                 <a:latin typeface="Calibri" pitchFamily="34" charset="0"/>
+                <a:ea typeface="Amiri" pitchFamily="2" charset="-78"/>
                 <a:cs typeface="Amiri" pitchFamily="2" charset="-78"/>
               </a:rPr>
               <a:t>أَوَّلًا</a:t>
@@ -3889,11 +3910,12 @@
               <a:buNone/>
             </a:pPr>
             <a:r>
-              <a:rPr lang="en-US" sz="950" b="1" dirty="0">
+              <a:rPr lang="ar-SA" sz="950" b="1" dirty="0">
                 <a:solidFill>
                   <a:srgbClr val="FFFFFF"/>
                 </a:solidFill>
                 <a:latin typeface="Calibri" pitchFamily="34" charset="0"/>
+                <a:ea typeface="Amiri" pitchFamily="2" charset="-78"/>
                 <a:cs typeface="Amiri" pitchFamily="2" charset="-78"/>
               </a:rPr>
               <a:t>أَبْرَدُ مِنْ جَوِّ لَنْدَنَ</a:t>
@@ -3954,11 +3976,12 @@
               <a:buNone/>
             </a:pPr>
             <a:r>
-              <a:rPr lang="en-US" sz="950" b="1" dirty="0">
+              <a:rPr lang="ar-SA" sz="950" b="1" dirty="0">
                 <a:solidFill>
                   <a:srgbClr val="FFFFFF"/>
                 </a:solidFill>
                 <a:latin typeface="Calibri" pitchFamily="34" charset="0"/>
+                <a:ea typeface="Amiri" pitchFamily="2" charset="-78"/>
                 <a:cs typeface="Amiri" pitchFamily="2" charset="-78"/>
               </a:rPr>
               <a:t>بِالإِضَافَةِ إِلَى ذٰلِكَ</a:t>
@@ -4019,11 +4042,12 @@
               <a:buNone/>
             </a:pPr>
             <a:r>
-              <a:rPr lang="en-US" sz="950" b="1" dirty="0">
+              <a:rPr lang="ar-SA" sz="950" b="1" dirty="0">
                 <a:solidFill>
                   <a:srgbClr val="FFFFFF"/>
                 </a:solidFill>
                 <a:latin typeface="Calibri" pitchFamily="34" charset="0"/>
+                <a:ea typeface="Amiri" pitchFamily="2" charset="-78"/>
                 <a:cs typeface="Amiri" pitchFamily="2" charset="-78"/>
               </a:rPr>
               <a:t>إِذَا تَوَقَّفَ</a:t>
@@ -4157,6 +4181,7 @@
                   <a:srgbClr val="D4AF37"/>
                 </a:solidFill>
                 <a:latin typeface="Amiri" pitchFamily="2" charset="-78"/>
+                <a:ea typeface="Amiri" pitchFamily="2" charset="-78"/>
                 <a:cs typeface="Amiri" pitchFamily="2" charset="-78"/>
               </a:rPr>
               <a:t>م</a:t>
@@ -4477,6 +4502,7 @@
                   <a:srgbClr val="8A6D1E"/>
                 </a:solidFill>
                 <a:latin typeface="Amiri" pitchFamily="2" charset="-78"/>
+                <a:ea typeface="Amiri" pitchFamily="2" charset="-78"/>
                 <a:cs typeface="Amiri" pitchFamily="2" charset="-78"/>
               </a:rPr>
               <a:t>نَمُوذَجُ الإِجَابَةِ</a:t>
@@ -4590,6 +4616,7 @@
                   <a:srgbClr val="1F2A37"/>
                 </a:solidFill>
                 <a:latin typeface="Amiri" pitchFamily="2" charset="-78"/>
+                <a:ea typeface="Amiri" pitchFamily="2" charset="-78"/>
                 <a:cs typeface="Amiri" pitchFamily="2" charset="-78"/>
               </a:rPr>
               <a:t>عَزِيزِي يُوسُفُ،</a:t>
@@ -4609,6 +4636,7 @@
                   <a:srgbClr val="1F2A37"/>
                 </a:solidFill>
                 <a:latin typeface="Amiri" pitchFamily="2" charset="-78"/>
+                <a:ea typeface="Amiri" pitchFamily="2" charset="-78"/>
                 <a:cs typeface="Amiri" pitchFamily="2" charset="-78"/>
               </a:rPr>
               <a:t>تَحِيَّةً مِنْ إِدِنْبَرَةَ! وَصَلْنَا أَمْسِ بِالقِطَارِ، وَهِيَ وَسِيلَةٌ أَسْرَعُ وَأَنْظَفُ لِلْبِيئَةِ مِنَ الطَّائِرَةِ. أَوَّلُ مَا لَفَتَ نَظَرِي أَنَّ المَدِينَةَ مَزِيجٌ مِنَ القَدِيمِ وَالحَدِيثِ؛ فَقَلْعَتُهَا الحَجَرِيَّةُ تُطِلُّ عَلَى شَوَارِعَ مَلِيئَةٍ بِالمَقَاهِي وَمَحَطَّاتِ الدَّرَّاجَاتِ الكَهْرَبَائِيَّةِ. أَمَّا الطَّقْسُ فَمُتَقَلِّبٌ جِدًّا: شَمْسٌ فِي الصَّبَاحِ، ثُمَّ أَمْطَارٌ غَزِيرَةٌ بَعْدَ الظُّهْرِ، لِذٰلِكَ قَضَيْنَا سَاعَتَيْنِ فِي المَتْحَفِ الوَطَنِيِّ. وَمَعَ أَنَّ الجَوَّ أَبْرَدُ مِنْ جَوِّ لَنْدَنَ، فَإِنَّنِي أَحْبَبْتُ هُدُوءَهَا. وَإِذَا تَحَسَّنَ الطَّقْسُ غَدًا، فَسَنَصْعَدُ إِلَى قِمَّةِ "عَرْشِ آرْثَر"، وَسَأُرْسِلُ لَكَ الصُّوَرَ مُبَاشَرَةً عَبْرَ هَاتِفِي.</a:t>
@@ -4628,6 +4656,7 @@
                   <a:srgbClr val="1F2A37"/>
                 </a:solidFill>
                 <a:latin typeface="Amiri" pitchFamily="2" charset="-78"/>
+                <a:ea typeface="Amiri" pitchFamily="2" charset="-78"/>
                 <a:cs typeface="Amiri" pitchFamily="2" charset="-78"/>
               </a:rPr>
               <a:t>مَعَ تَحِيَّاتِي،</a:t>
@@ -4647,6 +4676,7 @@
                   <a:srgbClr val="1F2A37"/>
                 </a:solidFill>
                 <a:latin typeface="Amiri" pitchFamily="2" charset="-78"/>
+                <a:ea typeface="Amiri" pitchFamily="2" charset="-78"/>
                 <a:cs typeface="Amiri" pitchFamily="2" charset="-78"/>
               </a:rPr>
               <a:t>عَلِيٌّ</a:t>
@@ -4810,11 +4840,12 @@
               <a:buNone/>
             </a:pPr>
             <a:r>
-              <a:rPr lang="en-US" sz="950" b="1" dirty="0">
+              <a:rPr lang="ar-SA" sz="950" b="1" dirty="0">
                 <a:solidFill>
                   <a:srgbClr val="FFFFFF"/>
                 </a:solidFill>
                 <a:latin typeface="Calibri" pitchFamily="34" charset="0"/>
+                <a:ea typeface="Amiri" pitchFamily="2" charset="-78"/>
                 <a:cs typeface="Amiri" pitchFamily="2" charset="-78"/>
               </a:rPr>
               <a:t>أَوَّلُ مَا لَفَتَ نَظَرِي</a:t>
@@ -4875,11 +4906,12 @@
               <a:buNone/>
             </a:pPr>
             <a:r>
-              <a:rPr lang="en-US" sz="950" b="1" dirty="0">
+              <a:rPr lang="ar-SA" sz="950" b="1" dirty="0">
                 <a:solidFill>
                   <a:srgbClr val="FFFFFF"/>
                 </a:solidFill>
                 <a:latin typeface="Calibri" pitchFamily="34" charset="0"/>
+                <a:ea typeface="Amiri" pitchFamily="2" charset="-78"/>
                 <a:cs typeface="Amiri" pitchFamily="2" charset="-78"/>
               </a:rPr>
               <a:t>أَمَّا الطَّقْسُ فَمُتَقَلِّبٌ</a:t>
@@ -4940,11 +4972,12 @@
               <a:buNone/>
             </a:pPr>
             <a:r>
-              <a:rPr lang="en-US" sz="950" b="1" dirty="0">
+              <a:rPr lang="ar-SA" sz="950" b="1" dirty="0">
                 <a:solidFill>
                   <a:srgbClr val="FFFFFF"/>
                 </a:solidFill>
                 <a:latin typeface="Calibri" pitchFamily="34" charset="0"/>
+                <a:ea typeface="Amiri" pitchFamily="2" charset="-78"/>
                 <a:cs typeface="Amiri" pitchFamily="2" charset="-78"/>
               </a:rPr>
               <a:t>مَعَ أَنَّ … فَإِنَّنِي</a:t>
@@ -5005,11 +5038,12 @@
               <a:buNone/>
             </a:pPr>
             <a:r>
-              <a:rPr lang="en-US" sz="950" b="1" dirty="0">
+              <a:rPr lang="ar-SA" sz="950" b="1" dirty="0">
                 <a:solidFill>
                   <a:srgbClr val="FFFFFF"/>
                 </a:solidFill>
                 <a:latin typeface="Calibri" pitchFamily="34" charset="0"/>
+                <a:ea typeface="Amiri" pitchFamily="2" charset="-78"/>
                 <a:cs typeface="Amiri" pitchFamily="2" charset="-78"/>
               </a:rPr>
               <a:t>إِذَا تَحَسَّنَ … فَسَنَصْعَدُ</a:t>
@@ -5143,6 +5177,7 @@
                   <a:srgbClr val="D4AF37"/>
                 </a:solidFill>
                 <a:latin typeface="Amiri" pitchFamily="2" charset="-78"/>
+                <a:ea typeface="Amiri" pitchFamily="2" charset="-78"/>
                 <a:cs typeface="Amiri" pitchFamily="2" charset="-78"/>
               </a:rPr>
               <a:t>م</a:t>
@@ -5463,6 +5498,7 @@
                   <a:srgbClr val="8A6D1E"/>
                 </a:solidFill>
                 <a:latin typeface="Amiri" pitchFamily="2" charset="-78"/>
+                <a:ea typeface="Amiri" pitchFamily="2" charset="-78"/>
                 <a:cs typeface="Amiri" pitchFamily="2" charset="-78"/>
               </a:rPr>
               <a:t>اخْتَرْ عُنْوَانًا وَاحِدًا</a:t>
@@ -5743,6 +5779,7 @@
                   <a:srgbClr val="1B3B6F"/>
                 </a:solidFill>
                 <a:latin typeface="Amiri" pitchFamily="2" charset="-78"/>
+                <a:ea typeface="Amiri" pitchFamily="2" charset="-78"/>
                 <a:cs typeface="Amiri" pitchFamily="2" charset="-78"/>
               </a:rPr>
               <a:t>مَدِينَتِي: الطَّقْسُ وَالبِيئَةُ وَالحَيَاةُ الرَّقْمِيَّةُ</a:t>
@@ -5781,6 +5818,7 @@
                   <a:srgbClr val="1B3B6F"/>
                 </a:solidFill>
                 <a:latin typeface="Amiri" pitchFamily="2" charset="-78"/>
+                <a:ea typeface="Amiri" pitchFamily="2" charset="-78"/>
                 <a:cs typeface="Amiri" pitchFamily="2" charset="-78"/>
               </a:rPr>
               <a:t>(أ)</a:t>
@@ -5884,6 +5922,7 @@
                   <a:srgbClr val="1B3B6F"/>
                 </a:solidFill>
                 <a:latin typeface="Amiri" pitchFamily="2" charset="-78"/>
+                <a:ea typeface="Amiri" pitchFamily="2" charset="-78"/>
                 <a:cs typeface="Amiri" pitchFamily="2" charset="-78"/>
               </a:rPr>
               <a:t>مَدِينَتُكَ وَطَقْسُهَا · التِّكْنُولُوجْيَا فِي حَيَاتِكَ · حَدَثٌ بِيئِيٌّ عِشْتَهُ · رَأْيُكَ وَخِطَطُكَ</a:t>
@@ -6015,6 +6054,7 @@
                   <a:srgbClr val="1B3B6F"/>
                 </a:solidFill>
                 <a:latin typeface="Amiri" pitchFamily="2" charset="-78"/>
+                <a:ea typeface="Amiri" pitchFamily="2" charset="-78"/>
                 <a:cs typeface="Amiri" pitchFamily="2" charset="-78"/>
               </a:rPr>
               <a:t>جِيلُنَا وَالعَالَمُ المُتَغَيِّرُ</a:t>
@@ -6053,6 +6093,7 @@
                   <a:srgbClr val="1B3B6F"/>
                 </a:solidFill>
                 <a:latin typeface="Amiri" pitchFamily="2" charset="-78"/>
+                <a:ea typeface="Amiri" pitchFamily="2" charset="-78"/>
                 <a:cs typeface="Amiri" pitchFamily="2" charset="-78"/>
               </a:rPr>
               <a:t>(ب)</a:t>
@@ -6156,6 +6197,7 @@
                   <a:srgbClr val="1B3B6F"/>
                 </a:solidFill>
                 <a:latin typeface="Amiri" pitchFamily="2" charset="-78"/>
+                <a:ea typeface="Amiri" pitchFamily="2" charset="-78"/>
                 <a:cs typeface="Amiri" pitchFamily="2" charset="-78"/>
               </a:rPr>
               <a:t>التَّغَيُّرَاتُ حَوْلَنَا · التَّحَدِّيَاتُ وَالفُرَصُ · مِثَالٌ مِنْ تَجْرِبَتِكَ · رَأْيُكَ</a:t>
@@ -6355,6 +6397,7 @@
                   <a:srgbClr val="D4AF37"/>
                 </a:solidFill>
                 <a:latin typeface="Amiri" pitchFamily="2" charset="-78"/>
+                <a:ea typeface="Amiri" pitchFamily="2" charset="-78"/>
                 <a:cs typeface="Amiri" pitchFamily="2" charset="-78"/>
               </a:rPr>
               <a:t>م</a:t>
@@ -6675,6 +6718,7 @@
                   <a:srgbClr val="8A6D1E"/>
                 </a:solidFill>
                 <a:latin typeface="Amiri" pitchFamily="2" charset="-78"/>
+                <a:ea typeface="Amiri" pitchFamily="2" charset="-78"/>
                 <a:cs typeface="Amiri" pitchFamily="2" charset="-78"/>
               </a:rPr>
               <a:t>خُطَّةُ الكِتَابَةِ</a:t>
@@ -7299,6 +7343,7 @@
                   <a:srgbClr val="1B3B6F"/>
                 </a:solidFill>
                 <a:latin typeface="Amiri" pitchFamily="2" charset="-78"/>
+                <a:ea typeface="Amiri" pitchFamily="2" charset="-78"/>
                 <a:cs typeface="Amiri" pitchFamily="2" charset="-78"/>
               </a:rPr>
               <a:t>أَوَّلًا، تَسْقُطُ الأَمْطَارُ كَثِيرًا، لٰكِنَّ الصَّيْفَ دَافِئٌ.</a:t>
@@ -7398,6 +7443,7 @@
                   <a:srgbClr val="1B3B6F"/>
                 </a:solidFill>
                 <a:latin typeface="Amiri" pitchFamily="2" charset="-78"/>
+                <a:ea typeface="Amiri" pitchFamily="2" charset="-78"/>
                 <a:cs typeface="Amiri" pitchFamily="2" charset="-78"/>
               </a:rPr>
               <a:t>كَانَ الجَوُّ بَارِدًا، لٰكِنَّنَا جَمَعْنَا عِشْرِينَ كِيسًا.</a:t>
@@ -7497,6 +7543,7 @@
                   <a:srgbClr val="1B3B6F"/>
                 </a:solidFill>
                 <a:latin typeface="Amiri" pitchFamily="2" charset="-78"/>
+                <a:ea typeface="Amiri" pitchFamily="2" charset="-78"/>
                 <a:cs typeface="Amiri" pitchFamily="2" charset="-78"/>
               </a:rPr>
               <a:t>لِذٰلِكَ سَأَذْهَبُ إِلَى المَدْرَسَةِ بِالدَّرَّاجَةِ.</a:t>
@@ -7658,6 +7705,7 @@
                   <a:srgbClr val="1F2A37"/>
                 </a:solidFill>
                 <a:latin typeface="Amiri" pitchFamily="2" charset="-78"/>
+                <a:ea typeface="Amiri" pitchFamily="2" charset="-78"/>
                 <a:cs typeface="Amiri" pitchFamily="2" charset="-78"/>
               </a:rPr>
               <a:t>أ</a:t>
@@ -7684,6 +7732,7 @@
                   <a:srgbClr val="1F2A37"/>
                 </a:solidFill>
                 <a:latin typeface="Amiri" pitchFamily="2" charset="-78"/>
+                <a:ea typeface="Amiri" pitchFamily="2" charset="-78"/>
                 <a:cs typeface="Amiri" pitchFamily="2" charset="-78"/>
               </a:rPr>
               <a:t>ب</a:t>
@@ -7830,6 +7879,7 @@
                   <a:srgbClr val="D4AF37"/>
                 </a:solidFill>
                 <a:latin typeface="Amiri" pitchFamily="2" charset="-78"/>
+                <a:ea typeface="Amiri" pitchFamily="2" charset="-78"/>
                 <a:cs typeface="Amiri" pitchFamily="2" charset="-78"/>
               </a:rPr>
               <a:t>م</a:t>
@@ -8087,6 +8137,7 @@
                   <a:srgbClr val="8A6D1E"/>
                 </a:solidFill>
                 <a:latin typeface="Amiri" pitchFamily="2" charset="-78"/>
+                <a:ea typeface="Amiri" pitchFamily="2" charset="-78"/>
                 <a:cs typeface="Amiri" pitchFamily="2" charset="-78"/>
               </a:rPr>
               <a:t>أ</a:t>
@@ -8151,6 +8202,7 @@
                   <a:srgbClr val="1B3B6F"/>
                 </a:solidFill>
                 <a:latin typeface="Amiri" pitchFamily="2" charset="-78"/>
+                <a:ea typeface="Amiri" pitchFamily="2" charset="-78"/>
                 <a:cs typeface="Amiri" pitchFamily="2" charset="-78"/>
               </a:rPr>
               <a:t>أ</a:t>
@@ -8202,6 +8254,7 @@
                   <a:srgbClr val="8A6D1E"/>
                 </a:solidFill>
                 <a:latin typeface="Amiri" pitchFamily="2" charset="-78"/>
+                <a:ea typeface="Amiri" pitchFamily="2" charset="-78"/>
                 <a:cs typeface="Amiri" pitchFamily="2" charset="-78"/>
               </a:rPr>
               <a:t>نَمُوذَجُ الإِجَابَةِ</a:t>
@@ -8315,6 +8368,7 @@
                   <a:srgbClr val="1F2A37"/>
                 </a:solidFill>
                 <a:latin typeface="Amiri" pitchFamily="2" charset="-78"/>
+                <a:ea typeface="Amiri" pitchFamily="2" charset="-78"/>
                 <a:cs typeface="Amiri" pitchFamily="2" charset="-78"/>
               </a:rPr>
               <a:t>أَسْكُنُ فِي مَدِينَةِ لِيدْز فِي شَمَالِ إِنْجِلْتِرَا. أَوَّلًا، الطَّقْسُ هُنَا بَارِدٌ فِي الشِّتَاءِ، وَتَسْقُطُ الأَمْطَارُ كَثِيرًا، لٰكِنَّ الصَّيْفَ دَافِئٌ وَجَمِيلٌ. فِي مَدِينَتِي تُوجَدُ حَدَائِقُ كَبِيرَةٌ، وَيُوجَدُ مَرْكَزٌ تِجَارِيٌّ حَدِيثٌ، وَمَحَطَّةُ قِطَارٍ مَشْهُورَةٌ.</a:t>
@@ -8334,6 +8388,7 @@
                   <a:srgbClr val="1F2A37"/>
                 </a:solidFill>
                 <a:latin typeface="Amiri" pitchFamily="2" charset="-78"/>
+                <a:ea typeface="Amiri" pitchFamily="2" charset="-78"/>
                 <a:cs typeface="Amiri" pitchFamily="2" charset="-78"/>
               </a:rPr>
               <a:t>بِالإِضَافَةِ إِلَى ذٰلِكَ، أَسْتَخْدِمُ التِّكْنُولُوجْيَا كُلَّ يَوْمٍ. أَدْرُسُ عَلَى الإِنْتَرْنِتِ، وَأَتَوَاصَلُ مَعَ جَدَّتِي فِي مِصْرَ بِالفِيدْيُو. أُحِبُّ هٰذَا، لِأَنِّي أَرَاهَا كُلَّ أُسْبُوعٍ. لٰكِنِّي لَا أَسْتَخْدِمُ هَاتِفِي قَبْلَ النَّوْمِ.</a:t>
@@ -8353,6 +8408,7 @@
                   <a:srgbClr val="1F2A37"/>
                 </a:solidFill>
                 <a:latin typeface="Amiri" pitchFamily="2" charset="-78"/>
+                <a:ea typeface="Amiri" pitchFamily="2" charset="-78"/>
                 <a:cs typeface="Amiri" pitchFamily="2" charset="-78"/>
               </a:rPr>
               <a:t>فِي السَّنَةِ المَاضِيَةِ شَارَكْتُ مَعَ مَدْرَسَتِي فِي يَوْمٍ لِتَنْظِيفِ الحَدِيقَةِ. كَانَ الجَوُّ بَارِدًا، لٰكِنَّنَا جَمَعْنَا عِشْرِينَ كِيسًا مِنَ النُّفَايَاتِ. بَعْدَ ذٰلِكَ أَصْبَحَتِ الحَدِيقَةُ نَظِيفَةً، وَكُنَّا سُعَدَاءَ جِدًّا، وَعَادَتِ الطُّيُورُ إِلَيْهَا.</a:t>
@@ -8372,6 +8428,7 @@
                   <a:srgbClr val="1F2A37"/>
                 </a:solidFill>
                 <a:latin typeface="Amiri" pitchFamily="2" charset="-78"/>
+                <a:ea typeface="Amiri" pitchFamily="2" charset="-78"/>
                 <a:cs typeface="Amiri" pitchFamily="2" charset="-78"/>
               </a:rPr>
               <a:t>فِي رَأْيِي، مَدِينَتِي جَمِيلَةٌ، لٰكِنَّ الهَوَاءَ مُلَوَّثٌ بِسَبَبِ السَّيَّارَاتِ. لِذٰلِكَ سَأَذْهَبُ إِلَى المَدْرَسَةِ بِالدَّرَّاجَةِ، وَسَأَزْرَعُ شَجَرَةً فِي حَدِيقَةِ بَيْتِنَا فِي الرَّبِيعِ القَادِمِ.</a:t>
@@ -8535,11 +8592,12 @@
               <a:buNone/>
             </a:pPr>
             <a:r>
-              <a:rPr lang="en-US" sz="950" b="1" dirty="0">
+              <a:rPr lang="ar-SA" sz="950" b="1" dirty="0">
                 <a:solidFill>
                   <a:srgbClr val="FFFFFF"/>
                 </a:solidFill>
                 <a:latin typeface="Calibri" pitchFamily="34" charset="0"/>
+                <a:ea typeface="Amiri" pitchFamily="2" charset="-78"/>
                 <a:cs typeface="Amiri" pitchFamily="2" charset="-78"/>
               </a:rPr>
               <a:t>أَوَّلًا</a:t>
@@ -8600,11 +8658,12 @@
               <a:buNone/>
             </a:pPr>
             <a:r>
-              <a:rPr lang="en-US" sz="950" b="1" dirty="0">
+              <a:rPr lang="ar-SA" sz="950" b="1" dirty="0">
                 <a:solidFill>
                   <a:srgbClr val="FFFFFF"/>
                 </a:solidFill>
                 <a:latin typeface="Calibri" pitchFamily="34" charset="0"/>
+                <a:ea typeface="Amiri" pitchFamily="2" charset="-78"/>
                 <a:cs typeface="Amiri" pitchFamily="2" charset="-78"/>
               </a:rPr>
               <a:t>بِالإِضَافَةِ إِلَى ذٰلِكَ</a:t>
@@ -8665,11 +8724,12 @@
               <a:buNone/>
             </a:pPr>
             <a:r>
-              <a:rPr lang="en-US" sz="950" b="1" dirty="0">
+              <a:rPr lang="ar-SA" sz="950" b="1" dirty="0">
                 <a:solidFill>
                   <a:srgbClr val="FFFFFF"/>
                 </a:solidFill>
                 <a:latin typeface="Calibri" pitchFamily="34" charset="0"/>
+                <a:ea typeface="Amiri" pitchFamily="2" charset="-78"/>
                 <a:cs typeface="Amiri" pitchFamily="2" charset="-78"/>
               </a:rPr>
               <a:t>كَانَ الجَوُّ بَارِدًا</a:t>
@@ -8730,11 +8790,12 @@
               <a:buNone/>
             </a:pPr>
             <a:r>
-              <a:rPr lang="en-US" sz="950" b="1" dirty="0">
+              <a:rPr lang="ar-SA" sz="950" b="1" dirty="0">
                 <a:solidFill>
                   <a:srgbClr val="FFFFFF"/>
                 </a:solidFill>
                 <a:latin typeface="Calibri" pitchFamily="34" charset="0"/>
+                <a:ea typeface="Amiri" pitchFamily="2" charset="-78"/>
                 <a:cs typeface="Amiri" pitchFamily="2" charset="-78"/>
               </a:rPr>
               <a:t>لِذٰلِكَ سَأَذْهَبُ</a:t>
@@ -8868,6 +8929,7 @@
                   <a:srgbClr val="D4AF37"/>
                 </a:solidFill>
                 <a:latin typeface="Amiri" pitchFamily="2" charset="-78"/>
+                <a:ea typeface="Amiri" pitchFamily="2" charset="-78"/>
                 <a:cs typeface="Amiri" pitchFamily="2" charset="-78"/>
               </a:rPr>
               <a:t>م</a:t>
@@ -9125,6 +9187,7 @@
                   <a:srgbClr val="8A6D1E"/>
                 </a:solidFill>
                 <a:latin typeface="Amiri" pitchFamily="2" charset="-78"/>
+                <a:ea typeface="Amiri" pitchFamily="2" charset="-78"/>
                 <a:cs typeface="Amiri" pitchFamily="2" charset="-78"/>
               </a:rPr>
               <a:t>أ</a:t>
@@ -9189,6 +9252,7 @@
                   <a:srgbClr val="1B3B6F"/>
                 </a:solidFill>
                 <a:latin typeface="Amiri" pitchFamily="2" charset="-78"/>
+                <a:ea typeface="Amiri" pitchFamily="2" charset="-78"/>
                 <a:cs typeface="Amiri" pitchFamily="2" charset="-78"/>
               </a:rPr>
               <a:t>أ</a:t>
@@ -9240,6 +9304,7 @@
                   <a:srgbClr val="8A6D1E"/>
                 </a:solidFill>
                 <a:latin typeface="Amiri" pitchFamily="2" charset="-78"/>
+                <a:ea typeface="Amiri" pitchFamily="2" charset="-78"/>
                 <a:cs typeface="Amiri" pitchFamily="2" charset="-78"/>
               </a:rPr>
               <a:t>نَمُوذَجُ الإِجَابَةِ</a:t>
@@ -9353,6 +9418,7 @@
                   <a:srgbClr val="1F2A37"/>
                 </a:solidFill>
                 <a:latin typeface="Amiri" pitchFamily="2" charset="-78"/>
+                <a:ea typeface="Amiri" pitchFamily="2" charset="-78"/>
                 <a:cs typeface="Amiri" pitchFamily="2" charset="-78"/>
               </a:rPr>
               <a:t>لَوْ سَأَلْتَنِي قَبْلَ سَنَوَاتٍ عَنْ مَدِينَتِي، لَقُلْتُ إِنَّهَا رَمَادِيَّةٌ مُمْطِرَةٌ لَا جَدِيدَ فِيهَا. أَمَّا اليَوْمَ، فَأَرَاهَا مُخْتَلِفَةً تَمَامًا؛ فَقَدْ تَحَوَّلَتِ المَصَانِعُ القَدِيمَةُ إِلَى مَرَاكِزَ ثَقَافِيَّةٍ، وَانْتَشَرَتْ مَمَرَّاتُ الدَّرَّاجَاتِ وَالحَدَائِقُ الصَّغِيرَةُ فِي الأَحْيَاءِ، وَأَصْبَحَ وَسَطُ المَدِينَةِ مَكَانًا يَجْتَمِعُ فِيهِ الشَّبَابُ.</a:t>
@@ -9372,6 +9438,7 @@
                   <a:srgbClr val="1F2A37"/>
                 </a:solidFill>
                 <a:latin typeface="Amiri" pitchFamily="2" charset="-78"/>
+                <a:ea typeface="Amiri" pitchFamily="2" charset="-78"/>
                 <a:cs typeface="Amiri" pitchFamily="2" charset="-78"/>
               </a:rPr>
               <a:t>وَمَعَ ذٰلِكَ، مَا زَالَ الطَّقْسُ يَتَحَكَّمُ فِي حَيَاتِنَا؛ فَفِي الشِّتَاءِ المَاضِي فَاضَ النَّهْرُ بَعْدَ أُسْبُوعٍ مِنَ الأَمْطَارِ المُتَوَاصِلَةِ، فَأُغْلِقَتِ الطُّرُقُ، وَانْتَقَلَتْ دُرُوسُنَا إِلَى الإِنْتَرْنِتِ أَيَّامًا. عِنْدَهَا أَدْرَكْتُ كَيْفَ تَرْتَبِطُ البِيئَةُ وَالتِّكْنُولُوجْيَا وَالمَدِينَةُ بِبَعْضِهَا: فَلَوْلَا الحَوَاسِيبُ، لَتَوَقَّفَ تَعَلُّمُنَا تَمَامًا.</a:t>
@@ -9391,6 +9458,7 @@
                   <a:srgbClr val="1F2A37"/>
                 </a:solidFill>
                 <a:latin typeface="Amiri" pitchFamily="2" charset="-78"/>
+                <a:ea typeface="Amiri" pitchFamily="2" charset="-78"/>
                 <a:cs typeface="Amiri" pitchFamily="2" charset="-78"/>
               </a:rPr>
               <a:t>بِالإِضَافَةِ إِلَى ذٰلِكَ، تَطَوَّعْتُ بَعْدَ الفَيَضَانِ مَعَ جِيرَانِي لِتَنْظِيفِ ضِفَّةِ النَّهْرِ، فَتَعَرَّفْتُ إِلَى أَشْخَاصٍ مِنْ حَيِّي لَمْ أُكَلِّمْهُمْ قَطُّ مِنْ قَبْلُ، وَأَنْشَأْنَا مَعًا مَجْمُوعَةً عَلَى الإِنْتَرْنِتِ لِتَنْظِيمِ حَمَلَاتٍ أُخْرَى.</a:t>
@@ -9410,6 +9478,7 @@
                   <a:srgbClr val="1F2A37"/>
                 </a:solidFill>
                 <a:latin typeface="Amiri" pitchFamily="2" charset="-78"/>
+                <a:ea typeface="Amiri" pitchFamily="2" charset="-78"/>
                 <a:cs typeface="Amiri" pitchFamily="2" charset="-78"/>
               </a:rPr>
               <a:t>صَحِيحٌ أَنَّ مَدِينَتِي لَيْسَتْ مِثَالِيَّةً، غَيْرَ أَنَّهَا تَتَعَلَّمُ مِنْ أَخْطَائِهَا. وَإِذَا اسْتَمَرَّتْ فِي زِرَاعَةِ الأَشْجَارِ وَتَشْجِيعِ المُوَاصَلَاتِ النَّظِيفَةِ، فَسَتُصْبِحُ مِنْ أَفْضَلِ المُدُنِ لِلشَّبَابِ خِلَالَ عَشْرِ سَنَوَاتٍ.</a:t>
@@ -9508,11 +9577,12 @@
               <a:buNone/>
             </a:pPr>
             <a:r>
-              <a:rPr lang="en-US" sz="950" b="1" dirty="0">
+              <a:rPr lang="ar-SA" sz="950" b="1" dirty="0">
                 <a:solidFill>
                   <a:srgbClr val="FFFFFF"/>
                 </a:solidFill>
                 <a:latin typeface="Calibri" pitchFamily="34" charset="0"/>
+                <a:ea typeface="Amiri" pitchFamily="2" charset="-78"/>
                 <a:cs typeface="Amiri" pitchFamily="2" charset="-78"/>
               </a:rPr>
               <a:t>لَوْ سَأَلْتَنِي … لَقُلْتُ</a:t>
@@ -9573,11 +9643,12 @@
               <a:buNone/>
             </a:pPr>
             <a:r>
-              <a:rPr lang="en-US" sz="950" b="1" dirty="0">
+              <a:rPr lang="ar-SA" sz="950" b="1" dirty="0">
                 <a:solidFill>
                   <a:srgbClr val="FFFFFF"/>
                 </a:solidFill>
                 <a:latin typeface="Calibri" pitchFamily="34" charset="0"/>
+                <a:ea typeface="Amiri" pitchFamily="2" charset="-78"/>
                 <a:cs typeface="Amiri" pitchFamily="2" charset="-78"/>
               </a:rPr>
               <a:t>مَعَ ذٰلِكَ، مَا زَالَ</a:t>
@@ -9638,11 +9709,12 @@
               <a:buNone/>
             </a:pPr>
             <a:r>
-              <a:rPr lang="en-US" sz="950" b="1" dirty="0">
+              <a:rPr lang="ar-SA" sz="950" b="1" dirty="0">
                 <a:solidFill>
                   <a:srgbClr val="FFFFFF"/>
                 </a:solidFill>
                 <a:latin typeface="Calibri" pitchFamily="34" charset="0"/>
+                <a:ea typeface="Amiri" pitchFamily="2" charset="-78"/>
                 <a:cs typeface="Amiri" pitchFamily="2" charset="-78"/>
               </a:rPr>
               <a:t>لَوْلَا الحَوَاسِيبُ، لَتَوَقَّفَ</a:t>
@@ -9703,11 +9775,12 @@
               <a:buNone/>
             </a:pPr>
             <a:r>
-              <a:rPr lang="en-US" sz="950" b="1" dirty="0">
+              <a:rPr lang="ar-SA" sz="950" b="1" dirty="0">
                 <a:solidFill>
                   <a:srgbClr val="FFFFFF"/>
                 </a:solidFill>
                 <a:latin typeface="Calibri" pitchFamily="34" charset="0"/>
+                <a:ea typeface="Amiri" pitchFamily="2" charset="-78"/>
                 <a:cs typeface="Amiri" pitchFamily="2" charset="-78"/>
               </a:rPr>
               <a:t>إِذَا اسْتَمَرَّتْ … فَسَتُصْبِحُ</a:t>
@@ -9841,6 +9914,7 @@
                   <a:srgbClr val="D4AF37"/>
                 </a:solidFill>
                 <a:latin typeface="Amiri" pitchFamily="2" charset="-78"/>
+                <a:ea typeface="Amiri" pitchFamily="2" charset="-78"/>
                 <a:cs typeface="Amiri" pitchFamily="2" charset="-78"/>
               </a:rPr>
               <a:t>م</a:t>
@@ -10098,6 +10172,7 @@
                   <a:srgbClr val="8A6D1E"/>
                 </a:solidFill>
                 <a:latin typeface="Amiri" pitchFamily="2" charset="-78"/>
+                <a:ea typeface="Amiri" pitchFamily="2" charset="-78"/>
                 <a:cs typeface="Amiri" pitchFamily="2" charset="-78"/>
               </a:rPr>
               <a:t>ب</a:t>
@@ -10162,6 +10237,7 @@
                   <a:srgbClr val="1B3B6F"/>
                 </a:solidFill>
                 <a:latin typeface="Amiri" pitchFamily="2" charset="-78"/>
+                <a:ea typeface="Amiri" pitchFamily="2" charset="-78"/>
                 <a:cs typeface="Amiri" pitchFamily="2" charset="-78"/>
               </a:rPr>
               <a:t>ب</a:t>
@@ -10213,6 +10289,7 @@
                   <a:srgbClr val="8A6D1E"/>
                 </a:solidFill>
                 <a:latin typeface="Amiri" pitchFamily="2" charset="-78"/>
+                <a:ea typeface="Amiri" pitchFamily="2" charset="-78"/>
                 <a:cs typeface="Amiri" pitchFamily="2" charset="-78"/>
               </a:rPr>
               <a:t>نَمُوذَجُ الإِجَابَةِ</a:t>
@@ -10326,6 +10403,7 @@
                   <a:srgbClr val="1F2A37"/>
                 </a:solidFill>
                 <a:latin typeface="Amiri" pitchFamily="2" charset="-78"/>
+                <a:ea typeface="Amiri" pitchFamily="2" charset="-78"/>
                 <a:cs typeface="Amiri" pitchFamily="2" charset="-78"/>
               </a:rPr>
               <a:t>يَعِيشُ جِيلُنَا فِي عَالَمٍ يَتَغَيَّرُ بِسُرْعَةٍ لَمْ يَعْرِفْهَا أَحَدٌ مِنْ قَبْلُ؛ فَالمُنَاخُ يَزْدَادُ حَرَارَةً، وَالمُدُنُ تَكْبُرُ، وَالشَّاشَاتُ تَدْخُلُ كُلَّ لَحْظَةٍ مِنْ حَيَاتِنَا. فَهَلْ نَحْنُ ضَحَايَا هٰذِهِ التَّغَيُّرَاتِ، أَمْ قَادِرُونَ عَلَى تَوْجِيهِهَا؟</a:t>
@@ -10345,6 +10423,7 @@
                   <a:srgbClr val="1F2A37"/>
                 </a:solidFill>
                 <a:latin typeface="Amiri" pitchFamily="2" charset="-78"/>
+                <a:ea typeface="Amiri" pitchFamily="2" charset="-78"/>
                 <a:cs typeface="Amiri" pitchFamily="2" charset="-78"/>
               </a:rPr>
               <a:t>مِنْ نَاحِيَةٍ، وَرِثْنَا مَشَاكِلَ لَمْ نَصْنَعْهَا: هَوَاءً مُلَوَّثًا، وَبِحَارًا مَمْلُوءَةً بِالبْلَاسْتِيكِ، وَعَادَاتٍ اسْتِهْلَاكِيَّةً تُرْهِقُ الكَوْكَبَ. وَمِنْ نَاحِيَةٍ أُخْرَى، نَمْلِكُ أَدَوَاتٍ لَمْ تَكُنْ عِنْدَ أَجْدَادِنَا؛ فَبِضَغْطَةِ زِرٍّ نَسْتَطِيعُ أَنْ نُنَظِّمَ حَمْلَةً، أَوْ نُوَقِّعَ عَرِيضَةً، أَوْ نَتَعَلَّمَ مِنْ تَجَارِبِ شَبَابٍ فِي قَارَّاتٍ أُخْرَى.</a:t>
@@ -10364,6 +10443,7 @@
                   <a:srgbClr val="1F2A37"/>
                 </a:solidFill>
                 <a:latin typeface="Amiri" pitchFamily="2" charset="-78"/>
+                <a:ea typeface="Amiri" pitchFamily="2" charset="-78"/>
                 <a:cs typeface="Amiri" pitchFamily="2" charset="-78"/>
               </a:rPr>
               <a:t>وَقَدْ رَأَيْتُ قُوَّةَ هٰذِهِ الأَدَوَاتِ بِنَفْسِي؛ فَفِي العَامِ المَاضِي أَطْلَقَ طُلَّابُ مَدْرَسَتِي عَرِيضَةً إِلِكْتْرُونِيَّةً لِإِنْشَاءِ مَمَرٍّ آمِنٍ لِلدَّرَّاجَاتِ، فَجَمَعْنَا ثَلَاثَةَ آلَافِ تَوْقِيعٍ فِي أُسْبُوعَيْنِ، وَوَافَقَتِ البَلَدِيَّةُ عَلَى المَشْرُوعِ، وَبَدَأَ العَمَلُ فِيهِ هٰذَا الصَّيْفَ.</a:t>
@@ -10383,6 +10463,7 @@
                   <a:srgbClr val="1F2A37"/>
                 </a:solidFill>
                 <a:latin typeface="Amiri" pitchFamily="2" charset="-78"/>
+                <a:ea typeface="Amiri" pitchFamily="2" charset="-78"/>
                 <a:cs typeface="Amiri" pitchFamily="2" charset="-78"/>
               </a:rPr>
               <a:t>صَحِيحٌ أَنَّ التَّحَدِّيَاتِ كَبِيرَةٌ، غَيْرَ أَنَّ اليَأْسَ لَيْسَ خِيَارًا، وَالمُسْتَقْبَلُ يُصْنَعُ بِأَيْدِينَا نَحْنُ. وَلَوْ جَمَعْنَا بَيْنَ وَعْيِنَا البِيئِيِّ وَمَهَارَاتِنَا الرَّقْمِيَّةِ، لَصَنَعْنَا مُدُنًا أَنْظَفَ وَمُسْتَقْبَلًا أَعْدَلَ لِلْجَمِيعِ.</a:t>
@@ -10481,11 +10562,12 @@
               <a:buNone/>
             </a:pPr>
             <a:r>
-              <a:rPr lang="en-US" sz="950" b="1" dirty="0">
+              <a:rPr lang="ar-SA" sz="950" b="1" dirty="0">
                 <a:solidFill>
                   <a:srgbClr val="FFFFFF"/>
                 </a:solidFill>
                 <a:latin typeface="Calibri" pitchFamily="34" charset="0"/>
+                <a:ea typeface="Amiri" pitchFamily="2" charset="-78"/>
                 <a:cs typeface="Amiri" pitchFamily="2" charset="-78"/>
               </a:rPr>
               <a:t>لَمْ يَعْرِفْهَا أَحَدٌ</a:t>
@@ -10546,11 +10628,12 @@
               <a:buNone/>
             </a:pPr>
             <a:r>
-              <a:rPr lang="en-US" sz="950" b="1" dirty="0">
+              <a:rPr lang="ar-SA" sz="950" b="1" dirty="0">
                 <a:solidFill>
                   <a:srgbClr val="FFFFFF"/>
                 </a:solidFill>
                 <a:latin typeface="Calibri" pitchFamily="34" charset="0"/>
+                <a:ea typeface="Amiri" pitchFamily="2" charset="-78"/>
                 <a:cs typeface="Amiri" pitchFamily="2" charset="-78"/>
               </a:rPr>
               <a:t>مِنْ نَاحِيَةٍ … وَمِنْ نَاحِيَةٍ أُخْرَى</a:t>
@@ -10611,11 +10694,12 @@
               <a:buNone/>
             </a:pPr>
             <a:r>
-              <a:rPr lang="en-US" sz="950" b="1" dirty="0">
+              <a:rPr lang="ar-SA" sz="950" b="1" dirty="0">
                 <a:solidFill>
                   <a:srgbClr val="FFFFFF"/>
                 </a:solidFill>
                 <a:latin typeface="Calibri" pitchFamily="34" charset="0"/>
+                <a:ea typeface="Amiri" pitchFamily="2" charset="-78"/>
                 <a:cs typeface="Amiri" pitchFamily="2" charset="-78"/>
               </a:rPr>
               <a:t>فَجَمَعْنَا ثَلَاثَةَ آلَافِ</a:t>
@@ -10676,11 +10760,12 @@
               <a:buNone/>
             </a:pPr>
             <a:r>
-              <a:rPr lang="en-US" sz="950" b="1" dirty="0">
+              <a:rPr lang="ar-SA" sz="950" b="1" dirty="0">
                 <a:solidFill>
                   <a:srgbClr val="FFFFFF"/>
                 </a:solidFill>
                 <a:latin typeface="Calibri" pitchFamily="34" charset="0"/>
+                <a:ea typeface="Amiri" pitchFamily="2" charset="-78"/>
                 <a:cs typeface="Amiri" pitchFamily="2" charset="-78"/>
               </a:rPr>
               <a:t>لَوْ جَمَعْنَا … لَصَنَعْنَا</a:t>
@@ -10814,6 +10899,7 @@
                   <a:srgbClr val="D4AF37"/>
                 </a:solidFill>
                 <a:latin typeface="Amiri" pitchFamily="2" charset="-78"/>
+                <a:ea typeface="Amiri" pitchFamily="2" charset="-78"/>
                 <a:cs typeface="Amiri" pitchFamily="2" charset="-78"/>
               </a:rPr>
               <a:t>م</a:t>
@@ -11134,6 +11220,7 @@
                   <a:srgbClr val="8A6D1E"/>
                 </a:solidFill>
                 <a:latin typeface="Amiri" pitchFamily="2" charset="-78"/>
+                <a:ea typeface="Amiri" pitchFamily="2" charset="-78"/>
                 <a:cs typeface="Amiri" pitchFamily="2" charset="-78"/>
               </a:rPr>
               <a:t>قَيِّمْ عَمَلَكَ</a:t>
@@ -12378,6 +12465,7 @@
                   <a:srgbClr val="FFFFFF"/>
                 </a:solidFill>
                 <a:latin typeface="Amiri" pitchFamily="2" charset="-78"/>
+                <a:ea typeface="Amiri" pitchFamily="2" charset="-78"/>
                 <a:cs typeface="Amiri" pitchFamily="2" charset="-78"/>
               </a:rPr>
               <a:t>أَحْسَنْتُمْ! إِلَى اللِّقَاءِ</a:t>
@@ -12530,6 +12618,7 @@
                   <a:srgbClr val="D4AF37"/>
                 </a:solidFill>
                 <a:latin typeface="Amiri" pitchFamily="2" charset="-78"/>
+                <a:ea typeface="Amiri" pitchFamily="2" charset="-78"/>
                 <a:cs typeface="Amiri" pitchFamily="2" charset="-78"/>
               </a:rPr>
               <a:t>وَرْشَةُ التَّدْرِيبِ</a:t>
@@ -12663,6 +12752,7 @@
                   <a:srgbClr val="D4AF37"/>
                 </a:solidFill>
                 <a:latin typeface="Amiri" pitchFamily="2" charset="-78"/>
+                <a:ea typeface="Amiri" pitchFamily="2" charset="-78"/>
                 <a:cs typeface="Amiri" pitchFamily="2" charset="-78"/>
               </a:rPr>
               <a:t>م</a:t>
@@ -12983,6 +13073,7 @@
                   <a:srgbClr val="8A6D1E"/>
                 </a:solidFill>
                 <a:latin typeface="Amiri" pitchFamily="2" charset="-78"/>
+                <a:ea typeface="Amiri" pitchFamily="2" charset="-78"/>
                 <a:cs typeface="Amiri" pitchFamily="2" charset="-78"/>
               </a:rPr>
               <a:t>آدَابُ الصَّفِّ</a:t>
@@ -14514,6 +14605,7 @@
                   <a:srgbClr val="D4AF37"/>
                 </a:solidFill>
                 <a:latin typeface="Amiri" pitchFamily="2" charset="-78"/>
+                <a:ea typeface="Amiri" pitchFamily="2" charset="-78"/>
                 <a:cs typeface="Amiri" pitchFamily="2" charset="-78"/>
               </a:rPr>
               <a:t>م</a:t>
@@ -14834,6 +14926,7 @@
                   <a:srgbClr val="8A6D1E"/>
                 </a:solidFill>
                 <a:latin typeface="Amiri" pitchFamily="2" charset="-78"/>
+                <a:ea typeface="Amiri" pitchFamily="2" charset="-78"/>
                 <a:cs typeface="Amiri" pitchFamily="2" charset="-78"/>
               </a:rPr>
               <a:t>خَرِيطَةُ الوَرْشَةِ</a:t>
@@ -15148,6 +15241,7 @@
                   <a:srgbClr val="1B3B6F"/>
                 </a:solidFill>
                 <a:latin typeface="Amiri" pitchFamily="2" charset="-78"/>
+                <a:ea typeface="Amiri" pitchFamily="2" charset="-78"/>
                 <a:cs typeface="Amiri" pitchFamily="2" charset="-78"/>
               </a:rPr>
               <a:t>كَيْفَ</a:t>
@@ -15424,6 +15518,7 @@
                   <a:srgbClr val="1E6B52"/>
                 </a:solidFill>
                 <a:latin typeface="Amiri" pitchFamily="2" charset="-78"/>
+                <a:ea typeface="Amiri" pitchFamily="2" charset="-78"/>
                 <a:cs typeface="Amiri" pitchFamily="2" charset="-78"/>
               </a:rPr>
               <a:t>الاسْتِمَارَةُ</a:t>
@@ -15700,6 +15795,7 @@
                   <a:srgbClr val="1E6B52"/>
                 </a:solidFill>
                 <a:latin typeface="Amiri" pitchFamily="2" charset="-78"/>
+                <a:ea typeface="Amiri" pitchFamily="2" charset="-78"/>
                 <a:cs typeface="Amiri" pitchFamily="2" charset="-78"/>
               </a:rPr>
               <a:t>الرِّسَالَةُ</a:t>
@@ -15976,6 +16072,7 @@
                   <a:srgbClr val="1E6B52"/>
                 </a:solidFill>
                 <a:latin typeface="Amiri" pitchFamily="2" charset="-78"/>
+                <a:ea typeface="Amiri" pitchFamily="2" charset="-78"/>
                 <a:cs typeface="Amiri" pitchFamily="2" charset="-78"/>
               </a:rPr>
               <a:t>المَقَالُ</a:t>
@@ -16252,6 +16349,7 @@
                   <a:srgbClr val="8A6D1E"/>
                 </a:solidFill>
                 <a:latin typeface="Amiri" pitchFamily="2" charset="-78"/>
+                <a:ea typeface="Amiri" pitchFamily="2" charset="-78"/>
                 <a:cs typeface="Amiri" pitchFamily="2" charset="-78"/>
               </a:rPr>
               <a:t>قَيِّمْ</a:t>
@@ -16495,6 +16593,7 @@
                   <a:srgbClr val="D4AF37"/>
                 </a:solidFill>
                 <a:latin typeface="Amiri" pitchFamily="2" charset="-78"/>
+                <a:ea typeface="Amiri" pitchFamily="2" charset="-78"/>
                 <a:cs typeface="Amiri" pitchFamily="2" charset="-78"/>
               </a:rPr>
               <a:t>م</a:t>
@@ -16815,6 +16914,7 @@
                   <a:srgbClr val="8A6D1E"/>
                 </a:solidFill>
                 <a:latin typeface="Amiri" pitchFamily="2" charset="-78"/>
+                <a:ea typeface="Amiri" pitchFamily="2" charset="-78"/>
                 <a:cs typeface="Amiri" pitchFamily="2" charset="-78"/>
               </a:rPr>
               <a:t>امْتِحَانُ الكِتَابَةِ</a:t>
@@ -17439,6 +17539,7 @@
                   <a:srgbClr val="1B3B6F"/>
                 </a:solidFill>
                 <a:latin typeface="Amiri" pitchFamily="2" charset="-78"/>
+                <a:ea typeface="Amiri" pitchFamily="2" charset="-78"/>
                 <a:cs typeface="Amiri" pitchFamily="2" charset="-78"/>
               </a:rPr>
               <a:t>أَوَّلًا … بِالإِضَافَةِ إِلَى ذٰلِكَ … لِذٰلِكَ …</a:t>
@@ -17538,6 +17639,7 @@
                   <a:srgbClr val="1B3B6F"/>
                 </a:solidFill>
                 <a:latin typeface="Amiri" pitchFamily="2" charset="-78"/>
+                <a:ea typeface="Amiri" pitchFamily="2" charset="-78"/>
                 <a:cs typeface="Amiri" pitchFamily="2" charset="-78"/>
               </a:rPr>
               <a:t>وَمَعَ أَنَّ الجَوَّ أَبْرَدُ، فَإِنَّنِي أَحْبَبْتُ …</a:t>
@@ -17637,6 +17739,7 @@
                   <a:srgbClr val="1B3B6F"/>
                 </a:solidFill>
                 <a:latin typeface="Amiri" pitchFamily="2" charset="-78"/>
+                <a:ea typeface="Amiri" pitchFamily="2" charset="-78"/>
                 <a:cs typeface="Amiri" pitchFamily="2" charset="-78"/>
               </a:rPr>
               <a:t>لَوْلَا الحَوَاسِيبُ، لَتَوَقَّفَ تَعَلُّمُنَا</a:t>
@@ -17808,6 +17911,7 @@
                   <a:srgbClr val="D4AF37"/>
                 </a:solidFill>
                 <a:latin typeface="Amiri" pitchFamily="2" charset="-78"/>
+                <a:ea typeface="Amiri" pitchFamily="2" charset="-78"/>
                 <a:cs typeface="Amiri" pitchFamily="2" charset="-78"/>
               </a:rPr>
               <a:t>م</a:t>
@@ -18128,6 +18232,7 @@
                   <a:srgbClr val="8A6D1E"/>
                 </a:solidFill>
                 <a:latin typeface="Amiri" pitchFamily="2" charset="-78"/>
+                <a:ea typeface="Amiri" pitchFamily="2" charset="-78"/>
                 <a:cs typeface="Amiri" pitchFamily="2" charset="-78"/>
               </a:rPr>
               <a:t>اسْتِمَارَةُ بَرْنَامَجِ تَبَادُلِ الشَّبَابِ</a:t>
@@ -18484,6 +18589,7 @@
                   <a:srgbClr val="1B3B6F"/>
                 </a:solidFill>
                 <a:latin typeface="Amiri" pitchFamily="2" charset="-78"/>
+                <a:ea typeface="Amiri" pitchFamily="2" charset="-78"/>
                 <a:cs typeface="Amiri" pitchFamily="2" charset="-78"/>
               </a:rPr>
               <a:t>الاسْمُ وَالعُمْرُ</a:t>
@@ -18728,6 +18834,7 @@
                   <a:srgbClr val="1B3B6F"/>
                 </a:solidFill>
                 <a:latin typeface="Amiri" pitchFamily="2" charset="-78"/>
+                <a:ea typeface="Amiri" pitchFamily="2" charset="-78"/>
                 <a:cs typeface="Amiri" pitchFamily="2" charset="-78"/>
               </a:rPr>
               <a:t>المَدِينَةُ</a:t>
@@ -18972,6 +19079,7 @@
                   <a:srgbClr val="1B3B6F"/>
                 </a:solidFill>
                 <a:latin typeface="Amiri" pitchFamily="2" charset="-78"/>
+                <a:ea typeface="Amiri" pitchFamily="2" charset="-78"/>
                 <a:cs typeface="Amiri" pitchFamily="2" charset="-78"/>
               </a:rPr>
               <a:t>الطَّقْسُ فِي مَدِينَتِكَ</a:t>
@@ -19216,6 +19324,7 @@
                   <a:srgbClr val="1B3B6F"/>
                 </a:solidFill>
                 <a:latin typeface="Amiri" pitchFamily="2" charset="-78"/>
+                <a:ea typeface="Amiri" pitchFamily="2" charset="-78"/>
                 <a:cs typeface="Amiri" pitchFamily="2" charset="-78"/>
               </a:rPr>
               <a:t>مَكَانٌ مَشْهُورٌ فِي مَدِينَتِكَ</a:t>
@@ -19460,6 +19569,7 @@
                   <a:srgbClr val="1B3B6F"/>
                 </a:solidFill>
                 <a:latin typeface="Amiri" pitchFamily="2" charset="-78"/>
+                <a:ea typeface="Amiri" pitchFamily="2" charset="-78"/>
                 <a:cs typeface="Amiri" pitchFamily="2" charset="-78"/>
               </a:rPr>
               <a:t>التَّطْبِيقُ الَّذِي تَسْتَخْدِمُهُ أَكْثَرَ</a:t>
@@ -19704,6 +19814,7 @@
                   <a:srgbClr val="1B3B6F"/>
                 </a:solidFill>
                 <a:latin typeface="Amiri" pitchFamily="2" charset="-78"/>
+                <a:ea typeface="Amiri" pitchFamily="2" charset="-78"/>
                 <a:cs typeface="Amiri" pitchFamily="2" charset="-78"/>
               </a:rPr>
               <a:t>نَشَاطٌ بِيئِيٌّ تُمَارِسُهُ</a:t>
@@ -19948,6 +20059,7 @@
                   <a:srgbClr val="1B3B6F"/>
                 </a:solidFill>
                 <a:latin typeface="Amiri" pitchFamily="2" charset="-78"/>
+                <a:ea typeface="Amiri" pitchFamily="2" charset="-78"/>
                 <a:cs typeface="Amiri" pitchFamily="2" charset="-78"/>
               </a:rPr>
               <a:t>البَلَدُ الَّذِي تُرِيدُ زِيَارَتَهُ</a:t>
@@ -20127,6 +20239,7 @@
                   <a:srgbClr val="1B3B6F"/>
                 </a:solidFill>
                 <a:latin typeface="Amiri" pitchFamily="2" charset="-78"/>
+                <a:ea typeface="Amiri" pitchFamily="2" charset="-78"/>
                 <a:cs typeface="Amiri" pitchFamily="2" charset="-78"/>
               </a:rPr>
               <a:t>جُمْلَةٌ: لِمَاذَا تُرِيدُ المُشَارَكَةَ؟</a:t>
@@ -20336,6 +20449,7 @@
                   <a:srgbClr val="D4AF37"/>
                 </a:solidFill>
                 <a:latin typeface="Amiri" pitchFamily="2" charset="-78"/>
+                <a:ea typeface="Amiri" pitchFamily="2" charset="-78"/>
                 <a:cs typeface="Amiri" pitchFamily="2" charset="-78"/>
               </a:rPr>
               <a:t>م</a:t>
@@ -20656,6 +20770,7 @@
                   <a:srgbClr val="8A6D1E"/>
                 </a:solidFill>
                 <a:latin typeface="Amiri" pitchFamily="2" charset="-78"/>
+                <a:ea typeface="Amiri" pitchFamily="2" charset="-78"/>
                 <a:cs typeface="Amiri" pitchFamily="2" charset="-78"/>
               </a:rPr>
               <a:t>نَمُوذَجُ الإِجَابَةِ</a:t>
@@ -20974,6 +21089,7 @@
                   <a:srgbClr val="1B3B6F"/>
                 </a:solidFill>
                 <a:latin typeface="Amiri" pitchFamily="2" charset="-78"/>
+                <a:ea typeface="Amiri" pitchFamily="2" charset="-78"/>
                 <a:cs typeface="Amiri" pitchFamily="2" charset="-78"/>
               </a:rPr>
               <a:t>عَلِيٌّ حَسَنٌ، خَمْسَ عَشْرَةَ سَنَةً</a:t>
@@ -21012,6 +21128,7 @@
                   <a:srgbClr val="1B3B6F"/>
                 </a:solidFill>
                 <a:latin typeface="Amiri" pitchFamily="2" charset="-78"/>
+                <a:ea typeface="Amiri" pitchFamily="2" charset="-78"/>
                 <a:cs typeface="Amiri" pitchFamily="2" charset="-78"/>
               </a:rPr>
               <a:t>الاسْمُ وَالعُمْرُ</a:t>
@@ -21153,6 +21270,7 @@
                   <a:srgbClr val="1B3B6F"/>
                 </a:solidFill>
                 <a:latin typeface="Amiri" pitchFamily="2" charset="-78"/>
+                <a:ea typeface="Amiri" pitchFamily="2" charset="-78"/>
                 <a:cs typeface="Amiri" pitchFamily="2" charset="-78"/>
               </a:rPr>
               <a:t>لِيدْز</a:t>
@@ -21191,6 +21309,7 @@
                   <a:srgbClr val="1B3B6F"/>
                 </a:solidFill>
                 <a:latin typeface="Amiri" pitchFamily="2" charset="-78"/>
+                <a:ea typeface="Amiri" pitchFamily="2" charset="-78"/>
                 <a:cs typeface="Amiri" pitchFamily="2" charset="-78"/>
               </a:rPr>
               <a:t>المَدِينَةُ</a:t>
@@ -21332,6 +21451,7 @@
                   <a:srgbClr val="1B3B6F"/>
                 </a:solidFill>
                 <a:latin typeface="Amiri" pitchFamily="2" charset="-78"/>
+                <a:ea typeface="Amiri" pitchFamily="2" charset="-78"/>
                 <a:cs typeface="Amiri" pitchFamily="2" charset="-78"/>
               </a:rPr>
               <a:t>بَارِدٌ وَمُمْطِرٌ</a:t>
@@ -21370,6 +21490,7 @@
                   <a:srgbClr val="1B3B6F"/>
                 </a:solidFill>
                 <a:latin typeface="Amiri" pitchFamily="2" charset="-78"/>
+                <a:ea typeface="Amiri" pitchFamily="2" charset="-78"/>
                 <a:cs typeface="Amiri" pitchFamily="2" charset="-78"/>
               </a:rPr>
               <a:t>الطَّقْسُ فِي مَدِينَتِكَ</a:t>
@@ -21511,6 +21632,7 @@
                   <a:srgbClr val="1B3B6F"/>
                 </a:solidFill>
                 <a:latin typeface="Amiri" pitchFamily="2" charset="-78"/>
+                <a:ea typeface="Amiri" pitchFamily="2" charset="-78"/>
                 <a:cs typeface="Amiri" pitchFamily="2" charset="-78"/>
               </a:rPr>
               <a:t>السُّوقُ القَدِيمُ</a:t>
@@ -21549,6 +21671,7 @@
                   <a:srgbClr val="1B3B6F"/>
                 </a:solidFill>
                 <a:latin typeface="Amiri" pitchFamily="2" charset="-78"/>
+                <a:ea typeface="Amiri" pitchFamily="2" charset="-78"/>
                 <a:cs typeface="Amiri" pitchFamily="2" charset="-78"/>
               </a:rPr>
               <a:t>مَكَانٌ مَشْهُورٌ فِي مَدِينَتِكَ</a:t>
@@ -21690,6 +21813,7 @@
                   <a:srgbClr val="1B3B6F"/>
                 </a:solidFill>
                 <a:latin typeface="Amiri" pitchFamily="2" charset="-78"/>
+                <a:ea typeface="Amiri" pitchFamily="2" charset="-78"/>
                 <a:cs typeface="Amiri" pitchFamily="2" charset="-78"/>
               </a:rPr>
               <a:t>تَطْبِيقُ الخَرَائِطِ</a:t>
@@ -21728,6 +21852,7 @@
                   <a:srgbClr val="1B3B6F"/>
                 </a:solidFill>
                 <a:latin typeface="Amiri" pitchFamily="2" charset="-78"/>
+                <a:ea typeface="Amiri" pitchFamily="2" charset="-78"/>
                 <a:cs typeface="Amiri" pitchFamily="2" charset="-78"/>
               </a:rPr>
               <a:t>التَّطْبِيقُ الَّذِي تَسْتَخْدِمُهُ أَكْثَرَ</a:t>
@@ -21869,6 +21994,7 @@
                   <a:srgbClr val="1B3B6F"/>
                 </a:solidFill>
                 <a:latin typeface="Amiri" pitchFamily="2" charset="-78"/>
+                <a:ea typeface="Amiri" pitchFamily="2" charset="-78"/>
                 <a:cs typeface="Amiri" pitchFamily="2" charset="-78"/>
               </a:rPr>
               <a:t>إِعَادَةُ التَّدْوِيرِ</a:t>
@@ -21907,6 +22033,7 @@
                   <a:srgbClr val="1B3B6F"/>
                 </a:solidFill>
                 <a:latin typeface="Amiri" pitchFamily="2" charset="-78"/>
+                <a:ea typeface="Amiri" pitchFamily="2" charset="-78"/>
                 <a:cs typeface="Amiri" pitchFamily="2" charset="-78"/>
               </a:rPr>
               <a:t>نَشَاطٌ بِيئِيٌّ تُمَارِسُهُ</a:t>
@@ -22048,6 +22175,7 @@
                   <a:srgbClr val="1B3B6F"/>
                 </a:solidFill>
                 <a:latin typeface="Amiri" pitchFamily="2" charset="-78"/>
+                <a:ea typeface="Amiri" pitchFamily="2" charset="-78"/>
                 <a:cs typeface="Amiri" pitchFamily="2" charset="-78"/>
               </a:rPr>
               <a:t>المَغْرِبُ</a:t>
@@ -22086,6 +22214,7 @@
                   <a:srgbClr val="1B3B6F"/>
                 </a:solidFill>
                 <a:latin typeface="Amiri" pitchFamily="2" charset="-78"/>
+                <a:ea typeface="Amiri" pitchFamily="2" charset="-78"/>
                 <a:cs typeface="Amiri" pitchFamily="2" charset="-78"/>
               </a:rPr>
               <a:t>البَلَدُ الَّذِي تُرِيدُ زِيَارَتَهُ</a:t>
@@ -22230,6 +22359,7 @@
                   <a:srgbClr val="1B3B6F"/>
                 </a:solidFill>
                 <a:latin typeface="Amiri" pitchFamily="2" charset="-78"/>
+                <a:ea typeface="Amiri" pitchFamily="2" charset="-78"/>
                 <a:cs typeface="Amiri" pitchFamily="2" charset="-78"/>
               </a:rPr>
               <a:t>أُرِيدُ أَنْ أُشَارِكَ لِكَيْ أَتَعَرَّفَ عَلَى ثَقَافَةٍ جَدِيدَةٍ، وَأُقَارِنَ بَيْنَ حَيَاةِ الشَّبَابِ هُنَا وَهُنَاكَ.</a:t>
@@ -22268,6 +22398,7 @@
                   <a:srgbClr val="1B3B6F"/>
                 </a:solidFill>
                 <a:latin typeface="Amiri" pitchFamily="2" charset="-78"/>
+                <a:ea typeface="Amiri" pitchFamily="2" charset="-78"/>
                 <a:cs typeface="Amiri" pitchFamily="2" charset="-78"/>
               </a:rPr>
               <a:t>جُمْلَةٌ: لِمَاذَا تُرِيدُ المُشَارَكَةَ؟</a:t>
@@ -22477,6 +22608,7 @@
                   <a:srgbClr val="D4AF37"/>
                 </a:solidFill>
                 <a:latin typeface="Amiri" pitchFamily="2" charset="-78"/>
+                <a:ea typeface="Amiri" pitchFamily="2" charset="-78"/>
                 <a:cs typeface="Amiri" pitchFamily="2" charset="-78"/>
               </a:rPr>
               <a:t>م</a:t>
@@ -22797,6 +22929,7 @@
                   <a:srgbClr val="8A6D1E"/>
                 </a:solidFill>
                 <a:latin typeface="Amiri" pitchFamily="2" charset="-78"/>
+                <a:ea typeface="Amiri" pitchFamily="2" charset="-78"/>
                 <a:cs typeface="Amiri" pitchFamily="2" charset="-78"/>
               </a:rPr>
               <a:t>رِسَالَةٌ مِنْ مَدِينَةٍ جَدِيدَةٍ</a:t>
@@ -23272,6 +23405,7 @@
                   <a:srgbClr val="1B3B6F"/>
                 </a:solidFill>
                 <a:latin typeface="Amiri" pitchFamily="2" charset="-78"/>
+                <a:ea typeface="Amiri" pitchFamily="2" charset="-78"/>
                 <a:cs typeface="Amiri" pitchFamily="2" charset="-78"/>
               </a:rPr>
               <a:t>أَوَّلًا، المَدِينَةُ … فِيهَا … وَتُوجَدُ …</a:t>
@@ -23348,6 +23482,7 @@
                   <a:srgbClr val="1B3B6F"/>
                 </a:solidFill>
                 <a:latin typeface="Amiri" pitchFamily="2" charset="-78"/>
+                <a:ea typeface="Amiri" pitchFamily="2" charset="-78"/>
                 <a:cs typeface="Amiri" pitchFamily="2" charset="-78"/>
               </a:rPr>
               <a:t>لٰكِنَّ الجَوَّ … لِذٰلِكَ …</a:t>
@@ -23424,6 +23559,7 @@
                   <a:srgbClr val="1B3B6F"/>
                 </a:solidFill>
                 <a:latin typeface="Amiri" pitchFamily="2" charset="-78"/>
+                <a:ea typeface="Amiri" pitchFamily="2" charset="-78"/>
                 <a:cs typeface="Amiri" pitchFamily="2" charset="-78"/>
               </a:rPr>
               <a:t>أَمْسِ زُرْنَا … وَأَخَذْتُ صُوَرًا بِهَاتِفِي</a:t>
@@ -23500,6 +23636,7 @@
                   <a:srgbClr val="1B3B6F"/>
                 </a:solidFill>
                 <a:latin typeface="Amiri" pitchFamily="2" charset="-78"/>
+                <a:ea typeface="Amiri" pitchFamily="2" charset="-78"/>
                 <a:cs typeface="Amiri" pitchFamily="2" charset="-78"/>
               </a:rPr>
               <a:t>غَدًا سَنَصْعَدُ … إِذَا …</a:t>
@@ -23671,6 +23808,7 @@
                   <a:srgbClr val="D4AF37"/>
                 </a:solidFill>
                 <a:latin typeface="Amiri" pitchFamily="2" charset="-78"/>
+                <a:ea typeface="Amiri" pitchFamily="2" charset="-78"/>
                 <a:cs typeface="Amiri" pitchFamily="2" charset="-78"/>
               </a:rPr>
               <a:t>م</a:t>
@@ -23991,6 +24129,7 @@
                   <a:srgbClr val="8A6D1E"/>
                 </a:solidFill>
                 <a:latin typeface="Amiri" pitchFamily="2" charset="-78"/>
+                <a:ea typeface="Amiri" pitchFamily="2" charset="-78"/>
                 <a:cs typeface="Amiri" pitchFamily="2" charset="-78"/>
               </a:rPr>
               <a:t>نَصُّ السُّؤَالِ</a:t>
@@ -24271,6 +24410,7 @@
                   <a:srgbClr val="1B3B6F"/>
                 </a:solidFill>
                 <a:latin typeface="Amiri" pitchFamily="2" charset="-78"/>
+                <a:ea typeface="Amiri" pitchFamily="2" charset="-78"/>
                 <a:cs typeface="Amiri" pitchFamily="2" charset="-78"/>
               </a:rPr>
               <a:t>أَنْتَ فِي رِحْلَةٍ مَدْرَسِيَّةٍ إِلَى مَدِينَةٍ. اكْتُبْ رِسَالَةً إِلَى صَدِيقِكَ (٨٠–٩٠ كَلِمَةً).</a:t>
@@ -24412,6 +24552,7 @@
                   <a:srgbClr val="1B3B6F"/>
                 </a:solidFill>
                 <a:latin typeface="Amiri" pitchFamily="2" charset="-78"/>
+                <a:ea typeface="Amiri" pitchFamily="2" charset="-78"/>
                 <a:cs typeface="Amiri" pitchFamily="2" charset="-78"/>
               </a:rPr>
               <a:t>صِفِ المَدِينَةَ: المَبَانِي وَالأَمَاكِنَ.</a:t>
@@ -24553,6 +24694,7 @@
                   <a:srgbClr val="1B3B6F"/>
                 </a:solidFill>
                 <a:latin typeface="Amiri" pitchFamily="2" charset="-78"/>
+                <a:ea typeface="Amiri" pitchFamily="2" charset="-78"/>
                 <a:cs typeface="Amiri" pitchFamily="2" charset="-78"/>
               </a:rPr>
               <a:t>كَيْفَ الطَّقْسُ؟ وَكَيْفَ أَثَّرَ فِي خِطَطِكُمْ؟</a:t>
@@ -24694,6 +24836,7 @@
                   <a:srgbClr val="1B3B6F"/>
                 </a:solidFill>
                 <a:latin typeface="Amiri" pitchFamily="2" charset="-78"/>
+                <a:ea typeface="Amiri" pitchFamily="2" charset="-78"/>
                 <a:cs typeface="Amiri" pitchFamily="2" charset="-78"/>
               </a:rPr>
               <a:t>مَاذَا فَعَلْتَ أَمْسِ؟</a:t>
@@ -24835,6 +24978,7 @@
                   <a:srgbClr val="1B3B6F"/>
                 </a:solidFill>
                 <a:latin typeface="Amiri" pitchFamily="2" charset="-78"/>
+                <a:ea typeface="Amiri" pitchFamily="2" charset="-78"/>
                 <a:cs typeface="Amiri" pitchFamily="2" charset="-78"/>
               </a:rPr>
               <a:t>مَا رَأْيُكَ؟ وَمَاذَا سَتَفْعَلُ غَدًا؟</a:t>
@@ -25044,6 +25188,7 @@
                   <a:srgbClr val="D4AF37"/>
                 </a:solidFill>
                 <a:latin typeface="Amiri" pitchFamily="2" charset="-78"/>
+                <a:ea typeface="Amiri" pitchFamily="2" charset="-78"/>
                 <a:cs typeface="Amiri" pitchFamily="2" charset="-78"/>
               </a:rPr>
               <a:t>م</a:t>
@@ -25364,6 +25509,7 @@
                   <a:srgbClr val="8A6D1E"/>
                 </a:solidFill>
                 <a:latin typeface="Amiri" pitchFamily="2" charset="-78"/>
+                <a:ea typeface="Amiri" pitchFamily="2" charset="-78"/>
                 <a:cs typeface="Amiri" pitchFamily="2" charset="-78"/>
               </a:rPr>
               <a:t>قَوَالِبُ الكِتَابَةِ</a:t>
@@ -25644,6 +25790,7 @@
                   <a:srgbClr val="1B3B6F"/>
                 </a:solidFill>
                 <a:latin typeface="Amiri" pitchFamily="2" charset="-78"/>
+                <a:ea typeface="Amiri" pitchFamily="2" charset="-78"/>
                 <a:cs typeface="Amiri" pitchFamily="2" charset="-78"/>
               </a:rPr>
               <a:t>مَرْحَبًا يَا ______ ، كَيْفَ حَالُكَ؟</a:t>
@@ -25850,6 +25997,7 @@
                   <a:srgbClr val="1B3B6F"/>
                 </a:solidFill>
                 <a:latin typeface="Amiri" pitchFamily="2" charset="-78"/>
+                <a:ea typeface="Amiri" pitchFamily="2" charset="-78"/>
                 <a:cs typeface="Amiri" pitchFamily="2" charset="-78"/>
               </a:rPr>
               <a:t>وَصَلْتُ أَمْسِ إِلَى ______ . أَوَّلًا، المَدِينَةُ ______ ؛ فِيهَا ______ .</a:t>
@@ -26056,6 +26204,7 @@
                   <a:srgbClr val="1B3B6F"/>
                 </a:solidFill>
                 <a:latin typeface="Amiri" pitchFamily="2" charset="-78"/>
+                <a:ea typeface="Amiri" pitchFamily="2" charset="-78"/>
                 <a:cs typeface="Amiri" pitchFamily="2" charset="-78"/>
               </a:rPr>
               <a:t>لٰكِنَّ الجَوَّ ______ ، وَهُوَ أَ______ مِنْ جَوِّ ______ .</a:t>
@@ -26262,6 +26411,7 @@
                   <a:srgbClr val="1B3B6F"/>
                 </a:solidFill>
                 <a:latin typeface="Amiri" pitchFamily="2" charset="-78"/>
+                <a:ea typeface="Amiri" pitchFamily="2" charset="-78"/>
                 <a:cs typeface="Amiri" pitchFamily="2" charset="-78"/>
               </a:rPr>
               <a:t>أَمْسِ زُرْنَا ______ ، وَ______ بِهَاتِفِي.</a:t>
@@ -26468,6 +26618,7 @@
                   <a:srgbClr val="1B3B6F"/>
                 </a:solidFill>
                 <a:latin typeface="Amiri" pitchFamily="2" charset="-78"/>
+                <a:ea typeface="Amiri" pitchFamily="2" charset="-78"/>
                 <a:cs typeface="Amiri" pitchFamily="2" charset="-78"/>
               </a:rPr>
               <a:t>فِي رَأْيِي ______ . غَدًا سَنَ______ إِذَا ______ .</a:t>
@@ -26674,6 +26825,7 @@
                   <a:srgbClr val="1B3B6F"/>
                 </a:solidFill>
                 <a:latin typeface="Amiri" pitchFamily="2" charset="-78"/>
+                <a:ea typeface="Amiri" pitchFamily="2" charset="-78"/>
                 <a:cs typeface="Amiri" pitchFamily="2" charset="-78"/>
               </a:rPr>
               <a:t>إِلَى اللِّقَاءِ، ______</a:t>
@@ -26913,13 +27065,9 @@
     <a:fontScheme name="Office">
       <a:majorFont>
         <a:latin typeface="Calibri Light" panose="020F0302020204030204"/>
-        <a:ea typeface=""/>
-        <a:cs typeface=""/>
-        <a:font script="Jpan" typeface="游ゴシック Light"/>
-        <a:font script="Hang" typeface="맑은 고딕"/>
-        <a:font script="Hans" typeface="等线 Light"/>
-        <a:font script="Hant" typeface="新細明體"/>
-        <a:font script="Arab" typeface="Times New Roman"/>
+        <a:ea typeface="Amiri" pitchFamily="2" charset="-78"/>
+        <a:cs typeface="Amiri" pitchFamily="2" charset="-78"/>
+        <a:font script="Arab" typeface="Amiri"/>
         <a:font script="Hebr" typeface="Times New Roman"/>
         <a:font script="Thai" typeface="Angsana New"/>
         <a:font script="Ethi" typeface="Nyala"/>
@@ -26965,13 +27113,9 @@
       </a:majorFont>
       <a:minorFont>
         <a:latin typeface="Calibri" panose="020F0502020204030204"/>
-        <a:ea typeface=""/>
-        <a:cs typeface=""/>
-        <a:font script="Jpan" typeface="游ゴシック"/>
-        <a:font script="Hang" typeface="맑은 고딕"/>
-        <a:font script="Hans" typeface="等线"/>
-        <a:font script="Hant" typeface="新細明體"/>
-        <a:font script="Arab" typeface="Arial"/>
+        <a:ea typeface="Amiri" pitchFamily="2" charset="-78"/>
+        <a:cs typeface="Amiri" pitchFamily="2" charset="-78"/>
+        <a:font script="Arab" typeface="Amiri"/>
         <a:font script="Hebr" typeface="Arial"/>
         <a:font script="Thai" typeface="Cordia New"/>
         <a:font script="Ethi" typeface="Nyala"/>

--- a/Topic_C/Exam_Practice/TC-L11_Writing_Workshop_Integrated_Communication_Workshop.pptx
+++ b/Topic_C/Exam_Practice/TC-L11_Writing_Workshop_Integrated_Communication_Workshop.pptx
@@ -3848,7 +3848,7 @@
                 <a:solidFill>
                   <a:srgbClr val="FFFFFF"/>
                 </a:solidFill>
-                <a:latin typeface="Calibri" pitchFamily="34" charset="0"/>
+                <a:latin typeface="Amiri" pitchFamily="2" charset="-78"/>
                 <a:ea typeface="Amiri" pitchFamily="2" charset="-78"/>
                 <a:cs typeface="Amiri" pitchFamily="2" charset="-78"/>
               </a:rPr>
@@ -3914,7 +3914,7 @@
                 <a:solidFill>
                   <a:srgbClr val="FFFFFF"/>
                 </a:solidFill>
-                <a:latin typeface="Calibri" pitchFamily="34" charset="0"/>
+                <a:latin typeface="Amiri" pitchFamily="2" charset="-78"/>
                 <a:ea typeface="Amiri" pitchFamily="2" charset="-78"/>
                 <a:cs typeface="Amiri" pitchFamily="2" charset="-78"/>
               </a:rPr>
@@ -3980,7 +3980,7 @@
                 <a:solidFill>
                   <a:srgbClr val="FFFFFF"/>
                 </a:solidFill>
-                <a:latin typeface="Calibri" pitchFamily="34" charset="0"/>
+                <a:latin typeface="Amiri" pitchFamily="2" charset="-78"/>
                 <a:ea typeface="Amiri" pitchFamily="2" charset="-78"/>
                 <a:cs typeface="Amiri" pitchFamily="2" charset="-78"/>
               </a:rPr>
@@ -4046,7 +4046,7 @@
                 <a:solidFill>
                   <a:srgbClr val="FFFFFF"/>
                 </a:solidFill>
-                <a:latin typeface="Calibri" pitchFamily="34" charset="0"/>
+                <a:latin typeface="Amiri" pitchFamily="2" charset="-78"/>
                 <a:ea typeface="Amiri" pitchFamily="2" charset="-78"/>
                 <a:cs typeface="Amiri" pitchFamily="2" charset="-78"/>
               </a:rPr>
@@ -4844,7 +4844,7 @@
                 <a:solidFill>
                   <a:srgbClr val="FFFFFF"/>
                 </a:solidFill>
-                <a:latin typeface="Calibri" pitchFamily="34" charset="0"/>
+                <a:latin typeface="Amiri" pitchFamily="2" charset="-78"/>
                 <a:ea typeface="Amiri" pitchFamily="2" charset="-78"/>
                 <a:cs typeface="Amiri" pitchFamily="2" charset="-78"/>
               </a:rPr>
@@ -4910,7 +4910,7 @@
                 <a:solidFill>
                   <a:srgbClr val="FFFFFF"/>
                 </a:solidFill>
-                <a:latin typeface="Calibri" pitchFamily="34" charset="0"/>
+                <a:latin typeface="Amiri" pitchFamily="2" charset="-78"/>
                 <a:ea typeface="Amiri" pitchFamily="2" charset="-78"/>
                 <a:cs typeface="Amiri" pitchFamily="2" charset="-78"/>
               </a:rPr>
@@ -4976,7 +4976,7 @@
                 <a:solidFill>
                   <a:srgbClr val="FFFFFF"/>
                 </a:solidFill>
-                <a:latin typeface="Calibri" pitchFamily="34" charset="0"/>
+                <a:latin typeface="Amiri" pitchFamily="2" charset="-78"/>
                 <a:ea typeface="Amiri" pitchFamily="2" charset="-78"/>
                 <a:cs typeface="Amiri" pitchFamily="2" charset="-78"/>
               </a:rPr>
@@ -5042,7 +5042,7 @@
                 <a:solidFill>
                   <a:srgbClr val="FFFFFF"/>
                 </a:solidFill>
-                <a:latin typeface="Calibri" pitchFamily="34" charset="0"/>
+                <a:latin typeface="Amiri" pitchFamily="2" charset="-78"/>
                 <a:ea typeface="Amiri" pitchFamily="2" charset="-78"/>
                 <a:cs typeface="Amiri" pitchFamily="2" charset="-78"/>
               </a:rPr>
@@ -8596,7 +8596,7 @@
                 <a:solidFill>
                   <a:srgbClr val="FFFFFF"/>
                 </a:solidFill>
-                <a:latin typeface="Calibri" pitchFamily="34" charset="0"/>
+                <a:latin typeface="Amiri" pitchFamily="2" charset="-78"/>
                 <a:ea typeface="Amiri" pitchFamily="2" charset="-78"/>
                 <a:cs typeface="Amiri" pitchFamily="2" charset="-78"/>
               </a:rPr>
@@ -8662,7 +8662,7 @@
                 <a:solidFill>
                   <a:srgbClr val="FFFFFF"/>
                 </a:solidFill>
-                <a:latin typeface="Calibri" pitchFamily="34" charset="0"/>
+                <a:latin typeface="Amiri" pitchFamily="2" charset="-78"/>
                 <a:ea typeface="Amiri" pitchFamily="2" charset="-78"/>
                 <a:cs typeface="Amiri" pitchFamily="2" charset="-78"/>
               </a:rPr>
@@ -8728,7 +8728,7 @@
                 <a:solidFill>
                   <a:srgbClr val="FFFFFF"/>
                 </a:solidFill>
-                <a:latin typeface="Calibri" pitchFamily="34" charset="0"/>
+                <a:latin typeface="Amiri" pitchFamily="2" charset="-78"/>
                 <a:ea typeface="Amiri" pitchFamily="2" charset="-78"/>
                 <a:cs typeface="Amiri" pitchFamily="2" charset="-78"/>
               </a:rPr>
@@ -8794,7 +8794,7 @@
                 <a:solidFill>
                   <a:srgbClr val="FFFFFF"/>
                 </a:solidFill>
-                <a:latin typeface="Calibri" pitchFamily="34" charset="0"/>
+                <a:latin typeface="Amiri" pitchFamily="2" charset="-78"/>
                 <a:ea typeface="Amiri" pitchFamily="2" charset="-78"/>
                 <a:cs typeface="Amiri" pitchFamily="2" charset="-78"/>
               </a:rPr>
@@ -9581,7 +9581,7 @@
                 <a:solidFill>
                   <a:srgbClr val="FFFFFF"/>
                 </a:solidFill>
-                <a:latin typeface="Calibri" pitchFamily="34" charset="0"/>
+                <a:latin typeface="Amiri" pitchFamily="2" charset="-78"/>
                 <a:ea typeface="Amiri" pitchFamily="2" charset="-78"/>
                 <a:cs typeface="Amiri" pitchFamily="2" charset="-78"/>
               </a:rPr>
@@ -9647,7 +9647,7 @@
                 <a:solidFill>
                   <a:srgbClr val="FFFFFF"/>
                 </a:solidFill>
-                <a:latin typeface="Calibri" pitchFamily="34" charset="0"/>
+                <a:latin typeface="Amiri" pitchFamily="2" charset="-78"/>
                 <a:ea typeface="Amiri" pitchFamily="2" charset="-78"/>
                 <a:cs typeface="Amiri" pitchFamily="2" charset="-78"/>
               </a:rPr>
@@ -9713,7 +9713,7 @@
                 <a:solidFill>
                   <a:srgbClr val="FFFFFF"/>
                 </a:solidFill>
-                <a:latin typeface="Calibri" pitchFamily="34" charset="0"/>
+                <a:latin typeface="Amiri" pitchFamily="2" charset="-78"/>
                 <a:ea typeface="Amiri" pitchFamily="2" charset="-78"/>
                 <a:cs typeface="Amiri" pitchFamily="2" charset="-78"/>
               </a:rPr>
@@ -9779,7 +9779,7 @@
                 <a:solidFill>
                   <a:srgbClr val="FFFFFF"/>
                 </a:solidFill>
-                <a:latin typeface="Calibri" pitchFamily="34" charset="0"/>
+                <a:latin typeface="Amiri" pitchFamily="2" charset="-78"/>
                 <a:ea typeface="Amiri" pitchFamily="2" charset="-78"/>
                 <a:cs typeface="Amiri" pitchFamily="2" charset="-78"/>
               </a:rPr>
@@ -10566,7 +10566,7 @@
                 <a:solidFill>
                   <a:srgbClr val="FFFFFF"/>
                 </a:solidFill>
-                <a:latin typeface="Calibri" pitchFamily="34" charset="0"/>
+                <a:latin typeface="Amiri" pitchFamily="2" charset="-78"/>
                 <a:ea typeface="Amiri" pitchFamily="2" charset="-78"/>
                 <a:cs typeface="Amiri" pitchFamily="2" charset="-78"/>
               </a:rPr>
@@ -10632,7 +10632,7 @@
                 <a:solidFill>
                   <a:srgbClr val="FFFFFF"/>
                 </a:solidFill>
-                <a:latin typeface="Calibri" pitchFamily="34" charset="0"/>
+                <a:latin typeface="Amiri" pitchFamily="2" charset="-78"/>
                 <a:ea typeface="Amiri" pitchFamily="2" charset="-78"/>
                 <a:cs typeface="Amiri" pitchFamily="2" charset="-78"/>
               </a:rPr>
@@ -10698,7 +10698,7 @@
                 <a:solidFill>
                   <a:srgbClr val="FFFFFF"/>
                 </a:solidFill>
-                <a:latin typeface="Calibri" pitchFamily="34" charset="0"/>
+                <a:latin typeface="Amiri" pitchFamily="2" charset="-78"/>
                 <a:ea typeface="Amiri" pitchFamily="2" charset="-78"/>
                 <a:cs typeface="Amiri" pitchFamily="2" charset="-78"/>
               </a:rPr>
@@ -10764,7 +10764,7 @@
                 <a:solidFill>
                   <a:srgbClr val="FFFFFF"/>
                 </a:solidFill>
-                <a:latin typeface="Calibri" pitchFamily="34" charset="0"/>
+                <a:latin typeface="Amiri" pitchFamily="2" charset="-78"/>
                 <a:ea typeface="Amiri" pitchFamily="2" charset="-78"/>
                 <a:cs typeface="Amiri" pitchFamily="2" charset="-78"/>
               </a:rPr>
